--- a/Foundation_F1/Workshop/F1-W06_Apply_Workshop_L11-L12_Our_Arabic_Around_Us_Showcase.pptx
+++ b/Foundation_F1/Workshop/F1-W06_Apply_Workshop_L11-L12_Our_Arabic_Around_Us_Showcase.pptx
@@ -17350,7 +17350,7 @@
                 <a:latin typeface="Calibri" pitchFamily="34" charset="0"/>
                 <a:cs typeface="Amiri" pitchFamily="2" charset="-78"/>
               </a:rPr>
-              <a:t>Alphabet: </a:t>
+              <a:t>Alphabet: ‏</a:t>
             </a:r>
             <a:pPr algn="l" indent="0" marL="0">
               <a:buNone/>
@@ -17377,7 +17377,7 @@
                 <a:latin typeface="Calibri" pitchFamily="34" charset="0"/>
                 <a:cs typeface="Amiri" pitchFamily="2" charset="-78"/>
               </a:rPr>
-              <a:t> one dot below.</a:t>
+              <a:t>‏ one dot below.</a:t>
             </a:r>
             <a:endParaRPr lang="en-US" sz="1150" dirty="0"/>
           </a:p>
@@ -19558,7 +19558,7 @@
                 <a:latin typeface="Calibri" pitchFamily="34" charset="0"/>
                 <a:cs typeface="Amiri" pitchFamily="2" charset="-78"/>
               </a:rPr>
-              <a:t>☐  Sun letters doubled after al- (</a:t>
+              <a:t>☐  Sun letters doubled after al- (‏</a:t>
             </a:r>
             <a:pPr algn="l" indent="0" marL="0">
               <a:buNone/>
@@ -19585,7 +19585,7 @@
                 <a:latin typeface="Calibri" pitchFamily="34" charset="0"/>
                 <a:cs typeface="Amiri" pitchFamily="2" charset="-78"/>
               </a:rPr>
-              <a:t>).</a:t>
+              <a:t>‏).</a:t>
             </a:r>
             <a:endParaRPr lang="en-US" sz="1200" dirty="0"/>
           </a:p>
@@ -23209,7 +23209,7 @@
                 <a:latin typeface="Calibri" pitchFamily="34" charset="0"/>
                 <a:cs typeface="Amiri" pitchFamily="2" charset="-78"/>
               </a:rPr>
-              <a:t>join letters correctly — and leave a gap after </a:t>
+              <a:t>join letters correctly — and leave a gap after ‏</a:t>
             </a:r>
             <a:pPr algn="l" indent="0" marL="0">
               <a:buNone/>
@@ -23236,7 +23236,7 @@
                 <a:latin typeface="Calibri" pitchFamily="34" charset="0"/>
                 <a:cs typeface="Amiri" pitchFamily="2" charset="-78"/>
               </a:rPr>
-              <a:t>?</a:t>
+              <a:t>‏?</a:t>
             </a:r>
             <a:endParaRPr lang="en-US" sz="1100" dirty="0"/>
           </a:p>
@@ -34890,6 +34890,19 @@
               <a:buNone/>
             </a:pPr>
             <a:r>
+              <a:rPr lang="en-US" sz="1000" i="1" dirty="0">
+                <a:solidFill>
+                  <a:srgbClr val="8A6D1E"/>
+                </a:solidFill>
+                <a:latin typeface="Calibri" pitchFamily="34" charset="0"/>
+                <a:cs typeface="Amiri" pitchFamily="2" charset="-78"/>
+              </a:rPr>
+              <a:t>‏</a:t>
+            </a:r>
+            <a:pPr algn="l" indent="0" marL="0">
+              <a:buNone/>
+            </a:pPr>
+            <a:r>
               <a:rPr lang="ar-SA" altLang="en-US" sz="1300" dirty="0">
                 <a:solidFill>
                   <a:srgbClr val="8A6D1E"/>
@@ -34911,7 +34924,7 @@
                 <a:latin typeface="Calibri" pitchFamily="34" charset="0"/>
                 <a:cs typeface="Amiri" pitchFamily="2" charset="-78"/>
               </a:rPr>
-              <a:t> = the Arab world</a:t>
+              <a:t>‏ = the Arab world</a:t>
             </a:r>
             <a:endParaRPr lang="en-US" sz="1000" dirty="0"/>
           </a:p>
